--- a/documentos/proyectos-erasmus-ies-castelar.pptx
+++ b/documentos/proyectos-erasmus-ies-castelar.pptx
@@ -24,12 +24,12 @@
   <p:notesSz cx="6858000" cy="9144000"/>
   <p:embeddedFontLst>
     <p:embeddedFont>
-      <p:font typeface="Amatic SC" panose="020F0502020204030204" pitchFamily="2" charset="-79"/>
+      <p:font typeface="Amatic SC" panose="00000500000000000000" pitchFamily="2" charset="-79"/>
       <p:regular r:id="rId14"/>
       <p:bold r:id="rId15"/>
     </p:embeddedFont>
     <p:embeddedFont>
-      <p:font typeface="Source Code Pro" panose="020F0502020204030204" pitchFamily="49" charset="0"/>
+      <p:font typeface="Source Code Pro" panose="020B0509030403020204" pitchFamily="49" charset="0"/>
       <p:regular r:id="rId16"/>
       <p:bold r:id="rId17"/>
       <p:italic r:id="rId18"/>
@@ -284,12 +284,33 @@
 </p:presentation>
 </file>
 
-<file path=ppt/revisionInfo.xml><?xml version="1.0" encoding="utf-8"?>
-<p1510:revInfo xmlns:a="http://schemas.openxmlformats.org/drawingml/2006/main" xmlns:r="http://schemas.openxmlformats.org/officeDocument/2006/relationships" xmlns:p1510="http://schemas.microsoft.com/office/powerpoint/2015/10/main">
-  <p1510:revLst>
-    <p1510:client id="{6F276EAA-56C2-479A-A9A9-EDAC45AA0367}" v="1" dt="2026-07-11T17:57:25.335"/>
-  </p1510:revLst>
-</p1510:revInfo>
+<file path=ppt/changesInfos/changesInfo1.xml><?xml version="1.0" encoding="utf-8"?>
+<pc:chgInfo xmlns:a="http://schemas.openxmlformats.org/drawingml/2006/main" xmlns:r="http://schemas.openxmlformats.org/officeDocument/2006/relationships" xmlns:ac="http://schemas.microsoft.com/office/drawing/2013/main/command" xmlns:pc="http://schemas.microsoft.com/office/powerpoint/2013/main/command">
+  <pc:docChgLst>
+    <pc:chgData name="Diana Sosa Baltasar" userId="223eeb095415c413" providerId="LiveId" clId="{1A66A674-DABF-4A8D-B4ED-D80113475FD1}"/>
+    <pc:docChg chg="modSld">
+      <pc:chgData name="Diana Sosa Baltasar" userId="223eeb095415c413" providerId="LiveId" clId="{1A66A674-DABF-4A8D-B4ED-D80113475FD1}" dt="2026-07-19T19:07:32.948" v="28" actId="20577"/>
+      <pc:docMkLst>
+        <pc:docMk/>
+      </pc:docMkLst>
+      <pc:sldChg chg="modSp mod">
+        <pc:chgData name="Diana Sosa Baltasar" userId="223eeb095415c413" providerId="LiveId" clId="{1A66A674-DABF-4A8D-B4ED-D80113475FD1}" dt="2026-07-19T19:07:32.948" v="28" actId="20577"/>
+        <pc:sldMkLst>
+          <pc:docMk/>
+          <pc:sldMk cId="0" sldId="263"/>
+        </pc:sldMkLst>
+        <pc:spChg chg="mod">
+          <ac:chgData name="Diana Sosa Baltasar" userId="223eeb095415c413" providerId="LiveId" clId="{1A66A674-DABF-4A8D-B4ED-D80113475FD1}" dt="2026-07-19T19:07:32.948" v="28" actId="20577"/>
+          <ac:spMkLst>
+            <pc:docMk/>
+            <pc:sldMk cId="0" sldId="263"/>
+            <ac:spMk id="107" creationId="{00000000-0000-0000-0000-000000000000}"/>
+          </ac:spMkLst>
+        </pc:spChg>
+      </pc:sldChg>
+    </pc:docChg>
+  </pc:docChgLst>
+</pc:chgInfo>
 </file>
 
 <file path=ppt/notesMasters/notesMaster1.xml><?xml version="1.0" encoding="utf-8"?>
@@ -1698,7 +1719,7 @@
         </p:nvSpPr>
         <p:spPr>
           <a:xfrm>
-            <a:off x="381300" y="685800"/>
+            <a:off x="381000" y="685800"/>
             <a:ext cx="6096000" cy="3429000"/>
           </a:xfrm>
           <a:custGeom>
@@ -9269,7 +9290,7 @@
               </a:spcAft>
               <a:buNone/>
             </a:pPr>
-            <a:endParaRPr sz="2100" b="1"/>
+            <a:endParaRPr sz="2100" b="1" dirty="0"/>
           </a:p>
           <a:p>
             <a:pPr marL="457200" lvl="0" indent="0" algn="l" rtl="0">
@@ -9282,15 +9303,48 @@
               <a:buNone/>
             </a:pPr>
             <a:r>
-              <a:rPr lang="es" sz="2100" b="1"/>
+              <a:rPr lang="es" sz="2100" b="1" dirty="0"/>
               <a:t>Movilidades profesores</a:t>
             </a:r>
-            <a:endParaRPr sz="2100" b="1"/>
+            <a:endParaRPr sz="2100" b="1" dirty="0"/>
           </a:p>
           <a:p>
             <a:pPr marL="457200" lvl="0" indent="-361950" algn="l" rtl="0">
               <a:spcBef>
                 <a:spcPts val="1200"/>
+              </a:spcBef>
+              <a:spcAft>
+                <a:spcPts val="0"/>
+              </a:spcAft>
+              <a:buSzPts val="2100"/>
+              <a:buChar char="●"/>
+            </a:pPr>
+            <a:r>
+              <a:rPr lang="es" sz="2100" dirty="0"/>
+              <a:t>Job Shadowing en Berlín (Alemania) sobre la FP</a:t>
+            </a:r>
+            <a:endParaRPr sz="2100" dirty="0"/>
+          </a:p>
+          <a:p>
+            <a:pPr marL="457200" lvl="0" indent="-361950" algn="l" rtl="0">
+              <a:spcBef>
+                <a:spcPts val="0"/>
+              </a:spcBef>
+              <a:spcAft>
+                <a:spcPts val="0"/>
+              </a:spcAft>
+              <a:buSzPts val="2100"/>
+              <a:buChar char="●"/>
+            </a:pPr>
+            <a:r>
+              <a:rPr lang="es" sz="2100" dirty="0"/>
+              <a:t>4 profesores TCAE</a:t>
+            </a:r>
+          </a:p>
+          <a:p>
+            <a:pPr marL="457200" lvl="0" indent="-361950" algn="l" rtl="0">
+              <a:spcBef>
+                <a:spcPts val="0"/>
               </a:spcBef>
               <a:spcAft>
                 <a:spcPts val="0"/>
@@ -9300,38 +9354,21 @@
             </a:pPr>
             <a:r>
               <a:rPr lang="es" sz="2100"/>
-              <a:t>Job Shadowing en Berlín (Alemania) sobre la FP</a:t>
+              <a:t>1 curso Palermo (Italia)</a:t>
             </a:r>
             <a:endParaRPr sz="2100"/>
           </a:p>
           <a:p>
-            <a:pPr marL="457200" lvl="0" indent="-361950" algn="l" rtl="0">
-              <a:spcBef>
-                <a:spcPts val="0"/>
-              </a:spcBef>
-              <a:spcAft>
-                <a:spcPts val="0"/>
-              </a:spcAft>
-              <a:buSzPts val="2100"/>
-              <a:buChar char="●"/>
+            <a:pPr marL="457200" lvl="0" indent="0" algn="l" rtl="0">
+              <a:spcBef>
+                <a:spcPts val="1200"/>
+              </a:spcBef>
+              <a:spcAft>
+                <a:spcPts val="1200"/>
+              </a:spcAft>
+              <a:buNone/>
             </a:pPr>
-            <a:r>
-              <a:rPr lang="es" sz="2100"/>
-              <a:t>4 profesores TCAE</a:t>
-            </a:r>
-            <a:endParaRPr sz="2100"/>
-          </a:p>
-          <a:p>
-            <a:pPr marL="457200" lvl="0" indent="0" algn="l" rtl="0">
-              <a:spcBef>
-                <a:spcPts val="1200"/>
-              </a:spcBef>
-              <a:spcAft>
-                <a:spcPts val="1200"/>
-              </a:spcAft>
-              <a:buNone/>
-            </a:pPr>
-            <a:endParaRPr sz="2100"/>
+            <a:endParaRPr sz="2100" dirty="0"/>
           </a:p>
         </p:txBody>
       </p:sp>
